--- a/evaluation/dashboard/public/decks/uxl-sycl-build-debug-maintainer-briefing.pptx
+++ b/evaluation/dashboard/public/decks/uxl-sycl-build-debug-maintainer-briefing.pptx
@@ -2,20 +2,19 @@
 <file path=ppt/presentation.xml><?xml version="1.0" encoding="utf-8"?>
 <p:presentation xmlns:p="http://schemas.openxmlformats.org/presentationml/2006/main">
   <p:sldMasterIdLst>
-    <p:sldMasterId xmlns:r="http://schemas.openxmlformats.org/officeDocument/2006/relationships" id="2147483648" r:id="R29525af83e81413a"/>
-    <p:sldMasterId xmlns:r="http://schemas.openxmlformats.org/officeDocument/2006/relationships" id="2147483665" r:id="R7cad7a26f3d244b9"/>
+    <p:sldMasterId xmlns:r="http://schemas.openxmlformats.org/officeDocument/2006/relationships" id="2147483648" r:id="Rd54a69935d1549d1"/>
+    <p:sldMasterId xmlns:r="http://schemas.openxmlformats.org/officeDocument/2006/relationships" id="2147483665" r:id="R516d5ad8061b4da0"/>
   </p:sldMasterIdLst>
   <p:notesMasterIdLst>
-    <p:notesMasterId xmlns:r="http://schemas.openxmlformats.org/officeDocument/2006/relationships" r:id="Rf763458288414e4f"/>
+    <p:notesMasterId xmlns:r="http://schemas.openxmlformats.org/officeDocument/2006/relationships" r:id="Ra81261da91374a60"/>
   </p:notesMasterIdLst>
   <p:sldIdLst>
-    <p:sldId xmlns:r="http://schemas.openxmlformats.org/officeDocument/2006/relationships" id="256" r:id="Rbc2993baed474821"/>
-    <p:sldId xmlns:r="http://schemas.openxmlformats.org/officeDocument/2006/relationships" id="257" r:id="Rc1852623ebaf49f2"/>
-    <p:sldId xmlns:r="http://schemas.openxmlformats.org/officeDocument/2006/relationships" id="258" r:id="R2527da29f155427e"/>
-    <p:sldId xmlns:r="http://schemas.openxmlformats.org/officeDocument/2006/relationships" id="259" r:id="Rdd1f4cf18bd04dee"/>
-    <p:sldId xmlns:r="http://schemas.openxmlformats.org/officeDocument/2006/relationships" id="260" r:id="R8800d34d517048a0"/>
-    <p:sldId xmlns:r="http://schemas.openxmlformats.org/officeDocument/2006/relationships" id="261" r:id="R338daa35abcf4e1c"/>
-    <p:sldId xmlns:r="http://schemas.openxmlformats.org/officeDocument/2006/relationships" id="262" r:id="R96a81dd6d64a475b"/>
+    <p:sldId xmlns:r="http://schemas.openxmlformats.org/officeDocument/2006/relationships" id="256" r:id="R05f9d3af4a7c4ff5"/>
+    <p:sldId xmlns:r="http://schemas.openxmlformats.org/officeDocument/2006/relationships" id="257" r:id="R4dc964c9c5ad4456"/>
+    <p:sldId xmlns:r="http://schemas.openxmlformats.org/officeDocument/2006/relationships" id="258" r:id="R6938ca3f138b43bd"/>
+    <p:sldId xmlns:r="http://schemas.openxmlformats.org/officeDocument/2006/relationships" id="259" r:id="R1ba4517ef056468a"/>
+    <p:sldId xmlns:r="http://schemas.openxmlformats.org/officeDocument/2006/relationships" id="260" r:id="R92e399ecc4c54607"/>
+    <p:sldId xmlns:r="http://schemas.openxmlformats.org/officeDocument/2006/relationships" id="261" r:id="Rc8f130969022412f"/>
   </p:sldIdLst>
   <p:sldSz cx="12192000" cy="6858000"/>
   <p:notesSz cx="6858000" cy="9144000"/>
@@ -629,7 +628,7 @@
           </a:p>
           <a:p xmlns:a="http://schemas.openxmlformats.org/drawingml/2006/main">
             <a:r>
-              <a:t>Speaker cue: Why this is useful across UXL projects</a:t>
+              <a:t>Speaker cue: What the skill tells an agent today</a:t>
             </a:r>
           </a:p>
         </p:txBody>
@@ -739,7 +738,7 @@
           </a:p>
           <a:p xmlns:a="http://schemas.openxmlformats.org/drawingml/2006/main">
             <a:r>
-              <a:t>Speaker cue: What the skill tells an agent today</a:t>
+              <a:t>Speaker cue: Evaluation inventory: all 8 tasks implemented</a:t>
             </a:r>
           </a:p>
         </p:txBody>
@@ -849,7 +848,7 @@
           </a:p>
           <a:p xmlns:a="http://schemas.openxmlformats.org/drawingml/2006/main">
             <a:r>
-              <a:t>Speaker cue: Evaluation inventory: all 8 tasks implemented</a:t>
+              <a:t>Speaker cue: How we chose the content</a:t>
             </a:r>
           </a:p>
         </p:txBody>
@@ -959,7 +958,7 @@
           </a:p>
           <a:p xmlns:a="http://schemas.openxmlformats.org/drawingml/2006/main">
             <a:r>
-              <a:t>Speaker cue: How we chose the content</a:t>
+              <a:t>Speaker cue: What shared ownership would look like</a:t>
             </a:r>
           </a:p>
         </p:txBody>
@@ -990,116 +989,6 @@
 </file>
 
 <file path=ppt/notesSlides/notesSlide6.xml><?xml version="1.0" encoding="utf-8"?>
-<p:notes xmlns:p="http://schemas.openxmlformats.org/presentationml/2006/main">
-  <p:cSld>
-    <p:spTree>
-      <p:nvGrpSpPr>
-        <p:cNvPr id="1" name=""/>
-        <p:cNvGrpSpPr/>
-        <p:nvPr/>
-      </p:nvGrpSpPr>
-      <p:grpSpPr>
-        <a:xfrm xmlns:a="http://schemas.openxmlformats.org/drawingml/2006/main"/>
-      </p:grpSpPr>
-      <p:sp>
-        <p:nvSpPr>
-          <p:cNvPr id="2" name="Slide Image Placeholder 1"/>
-          <p:cNvSpPr>
-            <a:spLocks xmlns:a="http://schemas.openxmlformats.org/drawingml/2006/main" noGrp="1"/>
-          </p:cNvSpPr>
-          <p:nvPr>
-            <p:ph type="sldImg" idx="0"/>
-          </p:nvPr>
-        </p:nvSpPr>
-        <p:spPr/>
-      </p:sp>
-      <p:sp>
-        <p:nvSpPr>
-          <p:cNvPr id="3" name="Notes Placeholder 2"/>
-          <p:cNvSpPr>
-            <a:spLocks xmlns:a="http://schemas.openxmlformats.org/drawingml/2006/main" noGrp="1"/>
-          </p:cNvSpPr>
-          <p:nvPr>
-            <p:ph type="body" idx="1"/>
-          </p:nvPr>
-        </p:nvSpPr>
-        <p:spPr/>
-        <p:txBody>
-          <a:bodyPr xmlns:a="http://schemas.openxmlformats.org/drawingml/2006/main"/>
-          <a:lstStyle xmlns:a="http://schemas.openxmlformats.org/drawingml/2006/main"/>
-          <a:p xmlns:a="http://schemas.openxmlformats.org/drawingml/2006/main">
-            <a:r>
-              <a:t>[Sources]</a:t>
-            </a:r>
-          </a:p>
-          <a:p xmlns:a="http://schemas.openxmlformats.org/drawingml/2006/main">
-            <a:r>
-              <a:t>- https://github.com/uxlfoundation/skills/tree/main/skills/uxl-sycl-build-debug</a:t>
-            </a:r>
-          </a:p>
-          <a:p xmlns:a="http://schemas.openxmlformats.org/drawingml/2006/main">
-            <a:r>
-              <a:t>- https://github.com/uxlfoundation/skills/blob/main/skill-cards/uxl-sycl-build-debug.md</a:t>
-            </a:r>
-          </a:p>
-          <a:p xmlns:a="http://schemas.openxmlformats.org/drawingml/2006/main">
-            <a:r>
-              <a:t>- https://github.com/uxlfoundation/skills/blob/main/docs/maintainer-review/uxl-sycl-build-debug.md</a:t>
-            </a:r>
-          </a:p>
-          <a:p xmlns:a="http://schemas.openxmlformats.org/drawingml/2006/main">
-            <a:r>
-              <a:t>- https://github.com/uxlfoundation/skills/blob/main/evaluation/harbor/suites.json</a:t>
-            </a:r>
-          </a:p>
-          <a:p xmlns:a="http://schemas.openxmlformats.org/drawingml/2006/main">
-            <a:r>
-              <a:t>- https://github.com/uxlfoundation/skills/blob/main/evaluation/harbor/EVALUATOR_POLICY.md</a:t>
-            </a:r>
-          </a:p>
-          <a:p xmlns:a="http://schemas.openxmlformats.org/drawingml/2006/main">
-            <a:r>
-              <a:t>[/Sources]</a:t>
-            </a:r>
-          </a:p>
-          <a:p xmlns:a="http://schemas.openxmlformats.org/drawingml/2006/main">
-            <a:r>
-              <a:t/>
-            </a:r>
-          </a:p>
-          <a:p xmlns:a="http://schemas.openxmlformats.org/drawingml/2006/main">
-            <a:r>
-              <a:t>Speaker cue: What shared ownership would look like</a:t>
-            </a:r>
-          </a:p>
-        </p:txBody>
-      </p:sp>
-      <p:sp>
-        <p:nvSpPr>
-          <p:cNvPr id="4" name="Slide Number Placeholder 3"/>
-          <p:cNvSpPr>
-            <a:spLocks xmlns:a="http://schemas.openxmlformats.org/drawingml/2006/main" noGrp="1"/>
-          </p:cNvSpPr>
-          <p:nvPr>
-            <p:ph type="sldNum" idx="5"/>
-          </p:nvPr>
-        </p:nvSpPr>
-        <p:spPr/>
-        <p:txBody>
-          <a:bodyPr xmlns:a="http://schemas.openxmlformats.org/drawingml/2006/main"/>
-          <a:lstStyle xmlns:a="http://schemas.openxmlformats.org/drawingml/2006/main"/>
-          <a:p xmlns:a="http://schemas.openxmlformats.org/drawingml/2006/main"/>
-        </p:txBody>
-      </p:sp>
-    </p:spTree>
-  </p:cSld>
-  <p:clrMapOvr>
-    <a:masterClrMapping xmlns:a="http://schemas.openxmlformats.org/drawingml/2006/main"/>
-  </p:clrMapOvr>
-</p:notes>
-</file>
-
-<file path=ppt/notesSlides/notesSlide7.xml><?xml version="1.0" encoding="utf-8"?>
 <p:notes xmlns:p="http://schemas.openxmlformats.org/presentationml/2006/main">
   <p:cSld>
     <p:spTree>
@@ -1215,7 +1104,7 @@
     <p:bg>
       <p:bgPr>
         <a:blipFill xmlns:a="http://schemas.openxmlformats.org/drawingml/2006/main">
-          <a:blip xmlns:r="http://schemas.openxmlformats.org/officeDocument/2006/relationships" r:embed="Rf2dc22b9d3e54922">
+          <a:blip xmlns:r="http://schemas.openxmlformats.org/officeDocument/2006/relationships" r:embed="R7ffd718bc7064707">
             <a:alphaModFix/>
           </a:blip>
           <a:stretch>
@@ -1650,7 +1539,7 @@
           <p:nvPr/>
         </p:nvPicPr>
         <p:blipFill rotWithShape="1">
-          <a:blip xmlns:r="http://schemas.openxmlformats.org/officeDocument/2006/relationships" xmlns:a="http://schemas.openxmlformats.org/drawingml/2006/main" r:embed="R0a7000779b40459a">
+          <a:blip xmlns:r="http://schemas.openxmlformats.org/officeDocument/2006/relationships" xmlns:a="http://schemas.openxmlformats.org/drawingml/2006/main" r:embed="R5707f1f07cef4ff2">
             <a:alphaModFix/>
           </a:blip>
           <a:srcRect xmlns:a="http://schemas.openxmlformats.org/drawingml/2006/main" l="0" t="0" r="0" b="0"/>
@@ -1680,7 +1569,7 @@
     <p:bg>
       <p:bgPr>
         <a:blipFill xmlns:a="http://schemas.openxmlformats.org/drawingml/2006/main">
-          <a:blip xmlns:r="http://schemas.openxmlformats.org/officeDocument/2006/relationships" r:embed="R5000a2c89e594314">
+          <a:blip xmlns:r="http://schemas.openxmlformats.org/officeDocument/2006/relationships" r:embed="R59d129ff39044bf2">
             <a:alphaModFix/>
           </a:blip>
           <a:stretch>
@@ -2714,7 +2603,7 @@
           <p:nvPr/>
         </p:nvPicPr>
         <p:blipFill rotWithShape="1">
-          <a:blip xmlns:r="http://schemas.openxmlformats.org/officeDocument/2006/relationships" xmlns:a="http://schemas.openxmlformats.org/drawingml/2006/main" r:embed="Rb9a7fda7af2a494a">
+          <a:blip xmlns:r="http://schemas.openxmlformats.org/officeDocument/2006/relationships" xmlns:a="http://schemas.openxmlformats.org/drawingml/2006/main" r:embed="Re15726e2105a496b">
             <a:alphaModFix/>
           </a:blip>
           <a:srcRect xmlns:a="http://schemas.openxmlformats.org/drawingml/2006/main" l="0" t="0" r="0" b="0"/>
@@ -3738,7 +3627,7 @@
           <p:nvPr/>
         </p:nvPicPr>
         <p:blipFill rotWithShape="1">
-          <a:blip xmlns:r="http://schemas.openxmlformats.org/officeDocument/2006/relationships" xmlns:a="http://schemas.openxmlformats.org/drawingml/2006/main" r:embed="Rd4b3e428c33346fd">
+          <a:blip xmlns:r="http://schemas.openxmlformats.org/officeDocument/2006/relationships" xmlns:a="http://schemas.openxmlformats.org/drawingml/2006/main" r:embed="R988580b1c07f45b1">
             <a:alphaModFix/>
           </a:blip>
           <a:srcRect xmlns:a="http://schemas.openxmlformats.org/drawingml/2006/main" l="0" t="0" r="0" b="0"/>
@@ -3768,7 +3657,7 @@
     <p:bg>
       <p:bgPr>
         <a:blipFill xmlns:a="http://schemas.openxmlformats.org/drawingml/2006/main">
-          <a:blip xmlns:r="http://schemas.openxmlformats.org/officeDocument/2006/relationships" r:embed="R7abfdab2762a4215">
+          <a:blip xmlns:r="http://schemas.openxmlformats.org/officeDocument/2006/relationships" r:embed="R88323bb088674b70">
             <a:alphaModFix/>
           </a:blip>
           <a:stretch>
@@ -5042,7 +4931,7 @@
           <p:nvPr/>
         </p:nvPicPr>
         <p:blipFill rotWithShape="1">
-          <a:blip xmlns:r="http://schemas.openxmlformats.org/officeDocument/2006/relationships" xmlns:a="http://schemas.openxmlformats.org/drawingml/2006/main" r:embed="R40854bb4c0ed4e14">
+          <a:blip xmlns:r="http://schemas.openxmlformats.org/officeDocument/2006/relationships" xmlns:a="http://schemas.openxmlformats.org/drawingml/2006/main" r:embed="R7cb79f4661f24ce8">
             <a:alphaModFix/>
           </a:blip>
           <a:srcRect xmlns:a="http://schemas.openxmlformats.org/drawingml/2006/main" l="0" t="0" r="0" b="0"/>
@@ -8286,7 +8175,7 @@
           <p:nvPr/>
         </p:nvPicPr>
         <p:blipFill rotWithShape="1">
-          <a:blip xmlns:r="http://schemas.openxmlformats.org/officeDocument/2006/relationships" xmlns:a="http://schemas.openxmlformats.org/drawingml/2006/main" r:embed="R3e08744e0e424ee2">
+          <a:blip xmlns:r="http://schemas.openxmlformats.org/officeDocument/2006/relationships" xmlns:a="http://schemas.openxmlformats.org/drawingml/2006/main" r:embed="R48039f85e6c44e3f">
             <a:alphaModFix/>
           </a:blip>
           <a:srcRect xmlns:a="http://schemas.openxmlformats.org/drawingml/2006/main" l="0" t="0" r="0" b="0"/>
@@ -10024,7 +9913,7 @@
           <p:nvPr/>
         </p:nvPicPr>
         <p:blipFill rotWithShape="1">
-          <a:blip xmlns:r="http://schemas.openxmlformats.org/officeDocument/2006/relationships" xmlns:a="http://schemas.openxmlformats.org/drawingml/2006/main" r:embed="R581bf51deeca4ab1">
+          <a:blip xmlns:r="http://schemas.openxmlformats.org/officeDocument/2006/relationships" xmlns:a="http://schemas.openxmlformats.org/drawingml/2006/main" r:embed="R6c41cac0009c43b1">
             <a:alphaModFix/>
           </a:blip>
           <a:srcRect xmlns:a="http://schemas.openxmlformats.org/drawingml/2006/main" l="0" t="0" r="0" b="0"/>
@@ -16853,7 +16742,7 @@
     <p:bg>
       <p:bgPr>
         <a:blipFill xmlns:a="http://schemas.openxmlformats.org/drawingml/2006/main">
-          <a:blip xmlns:r="http://schemas.openxmlformats.org/officeDocument/2006/relationships" r:embed="R5ebae49442014344">
+          <a:blip xmlns:r="http://schemas.openxmlformats.org/officeDocument/2006/relationships" r:embed="Rf57a962c0cb842d7">
             <a:alphaModFix/>
           </a:blip>
           <a:stretch>
@@ -17288,7 +17177,7 @@
           <p:nvPr/>
         </p:nvPicPr>
         <p:blipFill rotWithShape="1">
-          <a:blip xmlns:r="http://schemas.openxmlformats.org/officeDocument/2006/relationships" xmlns:a="http://schemas.openxmlformats.org/drawingml/2006/main" r:embed="R9dda20e6fc2740ac">
+          <a:blip xmlns:r="http://schemas.openxmlformats.org/officeDocument/2006/relationships" xmlns:a="http://schemas.openxmlformats.org/drawingml/2006/main" r:embed="R144c5a5851bf42e3">
             <a:alphaModFix/>
           </a:blip>
           <a:srcRect xmlns:a="http://schemas.openxmlformats.org/drawingml/2006/main" l="0" t="0" r="0" b="0"/>
@@ -17318,7 +17207,7 @@
     <p:bg>
       <p:bgPr>
         <a:blipFill xmlns:a="http://schemas.openxmlformats.org/drawingml/2006/main">
-          <a:blip xmlns:r="http://schemas.openxmlformats.org/officeDocument/2006/relationships" r:embed="Rccc740fcf68f43f0">
+          <a:blip xmlns:r="http://schemas.openxmlformats.org/officeDocument/2006/relationships" r:embed="Rc25fab442047497a">
             <a:alphaModFix/>
           </a:blip>
           <a:stretch>
@@ -17951,7 +17840,7 @@
           <p:nvPr/>
         </p:nvPicPr>
         <p:blipFill rotWithShape="1">
-          <a:blip xmlns:r="http://schemas.openxmlformats.org/officeDocument/2006/relationships" xmlns:a="http://schemas.openxmlformats.org/drawingml/2006/main" r:embed="R0e94bba198f740a3">
+          <a:blip xmlns:r="http://schemas.openxmlformats.org/officeDocument/2006/relationships" xmlns:a="http://schemas.openxmlformats.org/drawingml/2006/main" r:embed="R8b31c408e5e44d02">
             <a:alphaModFix/>
           </a:blip>
           <a:srcRect xmlns:a="http://schemas.openxmlformats.org/drawingml/2006/main" l="0" t="0" r="0" b="0"/>
@@ -18411,7 +18300,7 @@
     <p:bg>
       <p:bgPr>
         <a:blipFill xmlns:a="http://schemas.openxmlformats.org/drawingml/2006/main">
-          <a:blip xmlns:r="http://schemas.openxmlformats.org/officeDocument/2006/relationships" r:embed="Recb137713d3b46ae">
+          <a:blip xmlns:r="http://schemas.openxmlformats.org/officeDocument/2006/relationships" r:embed="Re5e7fa0510474b92">
             <a:alphaModFix/>
           </a:blip>
           <a:stretch>
@@ -19044,7 +18933,7 @@
           <p:nvPr/>
         </p:nvPicPr>
         <p:blipFill rotWithShape="1">
-          <a:blip xmlns:r="http://schemas.openxmlformats.org/officeDocument/2006/relationships" xmlns:a="http://schemas.openxmlformats.org/drawingml/2006/main" r:embed="Ref45ef3c36fd4454">
+          <a:blip xmlns:r="http://schemas.openxmlformats.org/officeDocument/2006/relationships" xmlns:a="http://schemas.openxmlformats.org/drawingml/2006/main" r:embed="R38e36b7a97fc48ad">
             <a:alphaModFix/>
           </a:blip>
           <a:srcRect xmlns:a="http://schemas.openxmlformats.org/drawingml/2006/main" l="0" t="0" r="0" b="0"/>
@@ -21700,7 +21589,7 @@
           <p:nvPr/>
         </p:nvPicPr>
         <p:blipFill rotWithShape="1">
-          <a:blip xmlns:r="http://schemas.openxmlformats.org/officeDocument/2006/relationships" xmlns:a="http://schemas.openxmlformats.org/drawingml/2006/main" r:embed="R2a0062aab9684bde">
+          <a:blip xmlns:r="http://schemas.openxmlformats.org/officeDocument/2006/relationships" xmlns:a="http://schemas.openxmlformats.org/drawingml/2006/main" r:embed="R7444d9ca8a5b45da">
             <a:alphaModFix/>
           </a:blip>
           <a:srcRect xmlns:a="http://schemas.openxmlformats.org/drawingml/2006/main" l="0" t="0" r="0" b="0"/>
@@ -21730,7 +21619,7 @@
     <p:bg>
       <p:bgPr>
         <a:blipFill xmlns:a="http://schemas.openxmlformats.org/drawingml/2006/main">
-          <a:blip xmlns:r="http://schemas.openxmlformats.org/officeDocument/2006/relationships" r:embed="R4408f30f984443d5">
+          <a:blip xmlns:r="http://schemas.openxmlformats.org/officeDocument/2006/relationships" r:embed="R0389185ff8cc4232">
             <a:alphaModFix/>
           </a:blip>
           <a:stretch>
@@ -22574,7 +22463,7 @@
           <p:nvPr/>
         </p:nvPicPr>
         <p:blipFill rotWithShape="1">
-          <a:blip xmlns:r="http://schemas.openxmlformats.org/officeDocument/2006/relationships" xmlns:a="http://schemas.openxmlformats.org/drawingml/2006/main" r:embed="R82c0fa6625074988">
+          <a:blip xmlns:r="http://schemas.openxmlformats.org/officeDocument/2006/relationships" xmlns:a="http://schemas.openxmlformats.org/drawingml/2006/main" r:embed="Rfc103ff1dbf94ee2">
             <a:alphaModFix/>
           </a:blip>
           <a:srcRect xmlns:a="http://schemas.openxmlformats.org/drawingml/2006/main" l="0" t="0" r="0" b="0"/>
@@ -22604,7 +22493,7 @@
     <p:bg>
       <p:bgPr>
         <a:blipFill xmlns:a="http://schemas.openxmlformats.org/drawingml/2006/main">
-          <a:blip xmlns:r="http://schemas.openxmlformats.org/officeDocument/2006/relationships" r:embed="R72a2a05417eb4dc0">
+          <a:blip xmlns:r="http://schemas.openxmlformats.org/officeDocument/2006/relationships" r:embed="R259b1979c4944927">
             <a:alphaModFix/>
           </a:blip>
           <a:stretch>
@@ -23552,7 +23441,7 @@
           <p:nvPr/>
         </p:nvPicPr>
         <p:blipFill rotWithShape="1">
-          <a:blip xmlns:r="http://schemas.openxmlformats.org/officeDocument/2006/relationships" xmlns:a="http://schemas.openxmlformats.org/drawingml/2006/main" r:embed="Ree46c698c4b04fb6">
+          <a:blip xmlns:r="http://schemas.openxmlformats.org/officeDocument/2006/relationships" xmlns:a="http://schemas.openxmlformats.org/drawingml/2006/main" r:embed="Rb0db50ec9ea347b4">
             <a:alphaModFix/>
           </a:blip>
           <a:srcRect xmlns:a="http://schemas.openxmlformats.org/drawingml/2006/main" l="0" t="0" r="0" b="0"/>
@@ -23582,7 +23471,7 @@
     <p:bg>
       <p:bgPr>
         <a:blipFill xmlns:a="http://schemas.openxmlformats.org/drawingml/2006/main">
-          <a:blip xmlns:r="http://schemas.openxmlformats.org/officeDocument/2006/relationships" r:embed="R94546fe0c9cf44bb">
+          <a:blip xmlns:r="http://schemas.openxmlformats.org/officeDocument/2006/relationships" r:embed="R1008419b1eef40dc">
             <a:alphaModFix/>
           </a:blip>
           <a:stretch>
@@ -24043,7 +23932,7 @@
           <p:nvPr/>
         </p:nvPicPr>
         <p:blipFill rotWithShape="1">
-          <a:blip xmlns:r="http://schemas.openxmlformats.org/officeDocument/2006/relationships" xmlns:a="http://schemas.openxmlformats.org/drawingml/2006/main" r:embed="R63f83b32a8cc4055">
+          <a:blip xmlns:r="http://schemas.openxmlformats.org/officeDocument/2006/relationships" xmlns:a="http://schemas.openxmlformats.org/drawingml/2006/main" r:embed="R54b65dff5e5f4c6e">
             <a:alphaModFix/>
           </a:blip>
           <a:srcRect xmlns:a="http://schemas.openxmlformats.org/drawingml/2006/main" l="0" t="0" r="0" b="0"/>
@@ -25755,22 +25644,22 @@
   </p:cSld>
   <p:clrMap bg1="lt1" tx1="dk1" bg2="dk2" tx2="lt2" accent1="accent1" accent2="accent2" accent3="accent3" accent4="accent4" accent5="accent5" accent6="accent6" hlink="hlink" folHlink="folHlink"/>
   <p:sldLayoutIdLst>
-    <p:sldLayoutId xmlns:r="http://schemas.openxmlformats.org/officeDocument/2006/relationships" id="2147483649" r:id="Rab4425a8923047d8"/>
-    <p:sldLayoutId xmlns:r="http://schemas.openxmlformats.org/officeDocument/2006/relationships" id="2147483650" r:id="Ra1110e1f25284718"/>
-    <p:sldLayoutId xmlns:r="http://schemas.openxmlformats.org/officeDocument/2006/relationships" id="2147483651" r:id="Re0b37bd964e94832"/>
-    <p:sldLayoutId xmlns:r="http://schemas.openxmlformats.org/officeDocument/2006/relationships" id="2147483652" r:id="R848c7a4d64f549be"/>
-    <p:sldLayoutId xmlns:r="http://schemas.openxmlformats.org/officeDocument/2006/relationships" id="2147483653" r:id="R72ad2da51bab4ded"/>
-    <p:sldLayoutId xmlns:r="http://schemas.openxmlformats.org/officeDocument/2006/relationships" id="2147483654" r:id="R097b1f64c3ae4077"/>
-    <p:sldLayoutId xmlns:r="http://schemas.openxmlformats.org/officeDocument/2006/relationships" id="2147483655" r:id="R90106edc98db41f5"/>
-    <p:sldLayoutId xmlns:r="http://schemas.openxmlformats.org/officeDocument/2006/relationships" id="2147483656" r:id="Rf8f388aadb0b46b5"/>
-    <p:sldLayoutId xmlns:r="http://schemas.openxmlformats.org/officeDocument/2006/relationships" id="2147483657" r:id="Rcfd883985655424c"/>
-    <p:sldLayoutId xmlns:r="http://schemas.openxmlformats.org/officeDocument/2006/relationships" id="2147483658" r:id="R0d378b308b3846e9"/>
-    <p:sldLayoutId xmlns:r="http://schemas.openxmlformats.org/officeDocument/2006/relationships" id="2147483659" r:id="Rfbe48886b37342a7"/>
-    <p:sldLayoutId xmlns:r="http://schemas.openxmlformats.org/officeDocument/2006/relationships" id="2147483660" r:id="Rb0199270728647bf"/>
-    <p:sldLayoutId xmlns:r="http://schemas.openxmlformats.org/officeDocument/2006/relationships" id="2147483661" r:id="R1b6085bbb2244a4d"/>
-    <p:sldLayoutId xmlns:r="http://schemas.openxmlformats.org/officeDocument/2006/relationships" id="2147483662" r:id="R28ef819dcaf44162"/>
-    <p:sldLayoutId xmlns:r="http://schemas.openxmlformats.org/officeDocument/2006/relationships" id="2147483663" r:id="Rb03b83c8761c452c"/>
-    <p:sldLayoutId xmlns:r="http://schemas.openxmlformats.org/officeDocument/2006/relationships" id="2147483664" r:id="Ra2a9d29790de4b38"/>
+    <p:sldLayoutId xmlns:r="http://schemas.openxmlformats.org/officeDocument/2006/relationships" id="2147483649" r:id="Ra4f08b3b81e64125"/>
+    <p:sldLayoutId xmlns:r="http://schemas.openxmlformats.org/officeDocument/2006/relationships" id="2147483650" r:id="R60eaa54271fb4699"/>
+    <p:sldLayoutId xmlns:r="http://schemas.openxmlformats.org/officeDocument/2006/relationships" id="2147483651" r:id="R884b475c37e94c7a"/>
+    <p:sldLayoutId xmlns:r="http://schemas.openxmlformats.org/officeDocument/2006/relationships" id="2147483652" r:id="R3e7beebac0c4418b"/>
+    <p:sldLayoutId xmlns:r="http://schemas.openxmlformats.org/officeDocument/2006/relationships" id="2147483653" r:id="Rede8b30047754cf9"/>
+    <p:sldLayoutId xmlns:r="http://schemas.openxmlformats.org/officeDocument/2006/relationships" id="2147483654" r:id="Re0168725ecd34e9b"/>
+    <p:sldLayoutId xmlns:r="http://schemas.openxmlformats.org/officeDocument/2006/relationships" id="2147483655" r:id="Rc6383963120a4fd9"/>
+    <p:sldLayoutId xmlns:r="http://schemas.openxmlformats.org/officeDocument/2006/relationships" id="2147483656" r:id="Rab3f190b15294ea1"/>
+    <p:sldLayoutId xmlns:r="http://schemas.openxmlformats.org/officeDocument/2006/relationships" id="2147483657" r:id="Rc960c08103e94c47"/>
+    <p:sldLayoutId xmlns:r="http://schemas.openxmlformats.org/officeDocument/2006/relationships" id="2147483658" r:id="Re04324add31f461a"/>
+    <p:sldLayoutId xmlns:r="http://schemas.openxmlformats.org/officeDocument/2006/relationships" id="2147483659" r:id="Ra16244500cb5450d"/>
+    <p:sldLayoutId xmlns:r="http://schemas.openxmlformats.org/officeDocument/2006/relationships" id="2147483660" r:id="R507dc18e7d294017"/>
+    <p:sldLayoutId xmlns:r="http://schemas.openxmlformats.org/officeDocument/2006/relationships" id="2147483661" r:id="Rae2537dbe6404f94"/>
+    <p:sldLayoutId xmlns:r="http://schemas.openxmlformats.org/officeDocument/2006/relationships" id="2147483662" r:id="Ra4bd3b2fbb5f4b21"/>
+    <p:sldLayoutId xmlns:r="http://schemas.openxmlformats.org/officeDocument/2006/relationships" id="2147483663" r:id="Rb9deda1545e742c8"/>
+    <p:sldLayoutId xmlns:r="http://schemas.openxmlformats.org/officeDocument/2006/relationships" id="2147483664" r:id="R974ce645d5494781"/>
   </p:sldLayoutIdLst>
   <p:hf hdr="0" ftr="0" dt="0"/>
   <p:txStyles>
@@ -27963,7 +27852,7 @@
           <p:nvPr/>
         </p:nvPicPr>
         <p:blipFill rotWithShape="1">
-          <a:blip xmlns:r="http://schemas.openxmlformats.org/officeDocument/2006/relationships" xmlns:a="http://schemas.openxmlformats.org/drawingml/2006/main" r:embed="Rd4ad09b69f7c4824">
+          <a:blip xmlns:r="http://schemas.openxmlformats.org/officeDocument/2006/relationships" xmlns:a="http://schemas.openxmlformats.org/drawingml/2006/main" r:embed="Rb7cfa8ccbaeb472b">
             <a:alphaModFix/>
           </a:blip>
           <a:srcRect xmlns:a="http://schemas.openxmlformats.org/drawingml/2006/main" l="0" t="0" r="0" b="0"/>
@@ -27986,19 +27875,19 @@
   </p:cSld>
   <p:clrMap bg1="lt1" tx1="dk1" bg2="dk2" tx2="lt2" accent1="accent1" accent2="accent2" accent3="accent3" accent4="accent4" accent5="accent5" accent6="accent6" hlink="hlink" folHlink="folHlink"/>
   <p:sldLayoutIdLst>
-    <p:sldLayoutId xmlns:r="http://schemas.openxmlformats.org/officeDocument/2006/relationships" id="2147483666" r:id="R70ba92072272475d"/>
-    <p:sldLayoutId xmlns:r="http://schemas.openxmlformats.org/officeDocument/2006/relationships" id="2147483667" r:id="R71107b5aaa50450d"/>
-    <p:sldLayoutId xmlns:r="http://schemas.openxmlformats.org/officeDocument/2006/relationships" id="2147483668" r:id="R2ccc9494bb8c4836"/>
-    <p:sldLayoutId xmlns:r="http://schemas.openxmlformats.org/officeDocument/2006/relationships" id="2147483669" r:id="R54ca0cbfeb6c4e69"/>
-    <p:sldLayoutId xmlns:r="http://schemas.openxmlformats.org/officeDocument/2006/relationships" id="2147483670" r:id="R1b5afad98f004fa4"/>
-    <p:sldLayoutId xmlns:r="http://schemas.openxmlformats.org/officeDocument/2006/relationships" id="2147483671" r:id="R0455a3ddb8074820"/>
-    <p:sldLayoutId xmlns:r="http://schemas.openxmlformats.org/officeDocument/2006/relationships" id="2147483672" r:id="R477e1d53781e4233"/>
-    <p:sldLayoutId xmlns:r="http://schemas.openxmlformats.org/officeDocument/2006/relationships" id="2147483673" r:id="R39b7157bfe3d44c9"/>
-    <p:sldLayoutId xmlns:r="http://schemas.openxmlformats.org/officeDocument/2006/relationships" id="2147483674" r:id="Rf9f217175553497c"/>
-    <p:sldLayoutId xmlns:r="http://schemas.openxmlformats.org/officeDocument/2006/relationships" id="2147483675" r:id="R4c47f6707edf440e"/>
-    <p:sldLayoutId xmlns:r="http://schemas.openxmlformats.org/officeDocument/2006/relationships" id="2147483676" r:id="Rb1ae464f17474651"/>
-    <p:sldLayoutId xmlns:r="http://schemas.openxmlformats.org/officeDocument/2006/relationships" id="2147483677" r:id="R768d2e320ffb4caf"/>
-    <p:sldLayoutId xmlns:r="http://schemas.openxmlformats.org/officeDocument/2006/relationships" id="2147483678" r:id="R3701317b30c3407b"/>
+    <p:sldLayoutId xmlns:r="http://schemas.openxmlformats.org/officeDocument/2006/relationships" id="2147483666" r:id="Rd50c3b1af8d34bf9"/>
+    <p:sldLayoutId xmlns:r="http://schemas.openxmlformats.org/officeDocument/2006/relationships" id="2147483667" r:id="R30457fd814b14041"/>
+    <p:sldLayoutId xmlns:r="http://schemas.openxmlformats.org/officeDocument/2006/relationships" id="2147483668" r:id="R4da3f0d0b5bf4f1a"/>
+    <p:sldLayoutId xmlns:r="http://schemas.openxmlformats.org/officeDocument/2006/relationships" id="2147483669" r:id="Reba21921baff4a58"/>
+    <p:sldLayoutId xmlns:r="http://schemas.openxmlformats.org/officeDocument/2006/relationships" id="2147483670" r:id="Rc7118064778a4bf9"/>
+    <p:sldLayoutId xmlns:r="http://schemas.openxmlformats.org/officeDocument/2006/relationships" id="2147483671" r:id="R9a11877cbe794c54"/>
+    <p:sldLayoutId xmlns:r="http://schemas.openxmlformats.org/officeDocument/2006/relationships" id="2147483672" r:id="Re878b55f601e403f"/>
+    <p:sldLayoutId xmlns:r="http://schemas.openxmlformats.org/officeDocument/2006/relationships" id="2147483673" r:id="R9e151e64013240a8"/>
+    <p:sldLayoutId xmlns:r="http://schemas.openxmlformats.org/officeDocument/2006/relationships" id="2147483674" r:id="R78b75cb7caef407d"/>
+    <p:sldLayoutId xmlns:r="http://schemas.openxmlformats.org/officeDocument/2006/relationships" id="2147483675" r:id="R77e481a86f03419c"/>
+    <p:sldLayoutId xmlns:r="http://schemas.openxmlformats.org/officeDocument/2006/relationships" id="2147483676" r:id="Rc58f5726b62b4b47"/>
+    <p:sldLayoutId xmlns:r="http://schemas.openxmlformats.org/officeDocument/2006/relationships" id="2147483677" r:id="R639e729bf2ce44bb"/>
+    <p:sldLayoutId xmlns:r="http://schemas.openxmlformats.org/officeDocument/2006/relationships" id="2147483678" r:id="R2a0053672ff74260"/>
   </p:sldLayoutIdLst>
   <p:hf hdr="0" ftr="0" dt="0"/>
   <p:txStyles>
@@ -29395,7 +29284,7 @@
           <a:lstStyle xmlns:a="http://schemas.openxmlformats.org/drawingml/2006/main"/>
           <a:p xmlns:a="http://schemas.openxmlformats.org/drawingml/2006/main">
             <a:r>
-              <a:t>Why this is useful across UXL projects</a:t>
+              <a:t>What the skill tells an agent today</a:t>
             </a:r>
           </a:p>
         </p:txBody>
@@ -29445,7 +29334,7 @@
                   <a:srgbClr val="000000"/>
                 </a:solidFill>
               </a:rPr>
-              <a:t> Shorten recurring triage — Agents classify configure, compile, link, loader, and device-selection failures before proposing fixes.</a:t>
+              <a:t> Classify the failing phase — Configure, compile, link, runtime load, or device selection.</a:t>
             </a:r>
           </a:p>
           <a:p xmlns:a="http://schemas.openxmlformats.org/drawingml/2006/main">
@@ -29466,7 +29355,7 @@
                   <a:srgbClr val="000000"/>
                 </a:solidFill>
               </a:rPr>
-              <a:t> Capture the environment once — OS, shell, compiler, CMake, target, runtime, device, and first error travel with the report.</a:t>
+              <a:t> Record a reproducible environment — Include toolchain versions, target, commands, first error, and a safe local probe.</a:t>
             </a:r>
           </a:p>
           <a:p xmlns:a="http://schemas.openxmlformats.org/drawingml/2006/main">
@@ -29487,7 +29376,7 @@
                   <a:srgbClr val="000000"/>
                 </a:solidFill>
               </a:rPr>
-              <a:t> Keep hypotheses separate — Compiler, package, backend, loader, device, and threading-runtime failures are tested independently.</a:t>
+              <a:t> Prove the selected device — Enumerate it and run a minimal workload before blaming a library.</a:t>
             </a:r>
           </a:p>
           <a:p xmlns:a="http://schemas.openxmlformats.org/drawingml/2006/main">
@@ -29508,7 +29397,28 @@
                   <a:srgbClr val="000000"/>
                 </a:solidFill>
               </a:rPr>
-              <a:t> Route domain questions correctly — General SYCL mechanics stay shared; exact library behavior returns to its owning project.</a:t>
+              <a:t> Check compile-time and runtime paths separately — CMake cache, link targets, loader paths, and plugins can fail independently.</a:t>
+            </a:r>
+          </a:p>
+          <a:p xmlns:a="http://schemas.openxmlformats.org/drawingml/2006/main">
+            <a:pPr marL="30" indent="-18">
+              <a:spcAft>
+                <a:spcPts val="10"/>
+              </a:spcAft>
+              <a:buChar char="•"/>
+              <a:defRPr sz="1913">
+                <a:solidFill>
+                  <a:srgbClr val="000000"/>
+                </a:solidFill>
+              </a:defRPr>
+            </a:pPr>
+            <a:r>
+              <a:rPr sz="1913" b="1">
+                <a:solidFill>
+                  <a:srgbClr val="000000"/>
+                </a:solidFill>
+              </a:rPr>
+              <a:t> Verify current support upstream — The skill does not embed a permanent backend matrix.</a:t>
             </a:r>
           </a:p>
         </p:txBody>
@@ -29600,7 +29510,7 @@
           <a:lstStyle xmlns:a="http://schemas.openxmlformats.org/drawingml/2006/main"/>
           <a:p xmlns:a="http://schemas.openxmlformats.org/drawingml/2006/main">
             <a:r>
-              <a:t>What the skill tells an agent today</a:t>
+              <a:t>Evaluation inventory: all 8 tasks implemented</a:t>
             </a:r>
           </a:p>
         </p:txBody>
@@ -29650,7 +29560,7 @@
                   <a:srgbClr val="000000"/>
                 </a:solidFill>
               </a:rPr>
-              <a:t> Classify the failing phase — Configure, compile, link, runtime load, or device selection.</a:t>
+              <a:t> Device and runtime — Windows/WSL discovery, loader/plugin mismatch, and silent CPU fallback.</a:t>
             </a:r>
           </a:p>
           <a:p xmlns:a="http://schemas.openxmlformats.org/drawingml/2006/main">
@@ -29671,7 +29581,7 @@
                   <a:srgbClr val="000000"/>
                 </a:solidFill>
               </a:rPr>
-              <a:t> Record a reproducible environment — Include toolchain versions, target, commands, first error, and a safe local probe.</a:t>
+              <a:t> Build contracts — Compiler cache, backend link, compile-time backend selection, and transitive target linking.</a:t>
             </a:r>
           </a:p>
           <a:p xmlns:a="http://schemas.openxmlformats.org/drawingml/2006/main">
@@ -29692,7 +29602,7 @@
                   <a:srgbClr val="000000"/>
                 </a:solidFill>
               </a:rPr>
-              <a:t> Prove the selected device — Enumerate it and run a minimal workload before blaming a library.</a:t>
+              <a:t> Runtime composition — oneDNN plus threading-runtime integration.</a:t>
             </a:r>
           </a:p>
           <a:p xmlns:a="http://schemas.openxmlformats.org/drawingml/2006/main">
@@ -29713,28 +29623,7 @@
                   <a:srgbClr val="000000"/>
                 </a:solidFill>
               </a:rPr>
-              <a:t> Check compile-time and runtime paths separately — CMake cache, link targets, loader paths, and plugins can fail independently.</a:t>
-            </a:r>
-          </a:p>
-          <a:p xmlns:a="http://schemas.openxmlformats.org/drawingml/2006/main">
-            <a:pPr marL="30" indent="-18">
-              <a:spcAft>
-                <a:spcPts val="10"/>
-              </a:spcAft>
-              <a:buChar char="•"/>
-              <a:defRPr sz="1913">
-                <a:solidFill>
-                  <a:srgbClr val="000000"/>
-                </a:solidFill>
-              </a:defRPr>
-            </a:pPr>
-            <a:r>
-              <a:rPr sz="1913" b="1">
-                <a:solidFill>
-                  <a:srgbClr val="000000"/>
-                </a:solidFill>
-              </a:rPr>
-              <a:t> Verify current support upstream — The skill does not embed a permanent backend matrix.</a:t>
+              <a:t> What remains — Maintainer ownership and matched evidence across representative toolchains, not more task-count filling.</a:t>
             </a:r>
           </a:p>
         </p:txBody>
@@ -29826,7 +29715,7 @@
           <a:lstStyle xmlns:a="http://schemas.openxmlformats.org/drawingml/2006/main"/>
           <a:p xmlns:a="http://schemas.openxmlformats.org/drawingml/2006/main">
             <a:r>
-              <a:t>Evaluation inventory: all 8 tasks implemented</a:t>
+              <a:t>How we chose the content</a:t>
             </a:r>
           </a:p>
         </p:txBody>
@@ -29876,7 +29765,7 @@
                   <a:srgbClr val="000000"/>
                 </a:solidFill>
               </a:rPr>
-              <a:t> Device and runtime — Windows/WSL discovery, loader/plugin mismatch, and silent CPU fallback.</a:t>
+              <a:t> Project-owned sources — SYCL toolchain docs plus UXL library build, example, test, and incident evidence.</a:t>
             </a:r>
           </a:p>
           <a:p xmlns:a="http://schemas.openxmlformats.org/drawingml/2006/main">
@@ -29897,7 +29786,7 @@
                   <a:srgbClr val="000000"/>
                 </a:solidFill>
               </a:rPr>
-              <a:t> Build contracts — Compiler cache, backend link, compile-time backend selection, and transitive target linking.</a:t>
+              <a:t> Failure-shaped coverage — Each task starts at a boundary maintainers repeatedly diagnose.</a:t>
             </a:r>
           </a:p>
           <a:p xmlns:a="http://schemas.openxmlformats.org/drawingml/2006/main">
@@ -29918,7 +29807,7 @@
                   <a:srgbClr val="000000"/>
                 </a:solidFill>
               </a:rPr>
-              <a:t> Runtime composition — oneDNN plus threading-runtime integration.</a:t>
+              <a:t> Portable checks — Verifiers test observed build/runtime behavior rather than vendor names.</a:t>
             </a:r>
           </a:p>
           <a:p xmlns:a="http://schemas.openxmlformats.org/drawingml/2006/main">
@@ -29939,7 +29828,7 @@
                   <a:srgbClr val="000000"/>
                 </a:solidFill>
               </a:rPr>
-              <a:t> What remains — Maintainer ownership and matched evidence across representative toolchains, not more task-count filling.</a:t>
+              <a:t> Honest limits — Specialized hardware enters only when hosted systems cannot reproduce the task faithfully.</a:t>
             </a:r>
           </a:p>
         </p:txBody>
@@ -30031,7 +29920,7 @@
           <a:lstStyle xmlns:a="http://schemas.openxmlformats.org/drawingml/2006/main"/>
           <a:p xmlns:a="http://schemas.openxmlformats.org/drawingml/2006/main">
             <a:r>
-              <a:t>How we chose the content</a:t>
+              <a:t>What shared ownership would look like</a:t>
             </a:r>
           </a:p>
         </p:txBody>
@@ -30081,7 +29970,7 @@
                   <a:srgbClr val="000000"/>
                 </a:solidFill>
               </a:rPr>
-              <a:t> Project-owned sources — SYCL toolchain docs plus UXL library build, example, test, and incident evidence.</a:t>
+              <a:t> UXL working-group reviewers own — Shared terminology, routing rules, safe probes, and vendor-neutral limitations.</a:t>
             </a:r>
           </a:p>
           <a:p xmlns:a="http://schemas.openxmlformats.org/drawingml/2006/main">
@@ -30102,7 +29991,7 @@
                   <a:srgbClr val="000000"/>
                 </a:solidFill>
               </a:rPr>
-              <a:t> Failure-shaped coverage — Each task starts at a boundary maintainers repeatedly diagnose.</a:t>
+              <a:t> Project maintainers validate hand-offs — Each library confirms where general SYCL triage ends and project behavior begins.</a:t>
             </a:r>
           </a:p>
           <a:p xmlns:a="http://schemas.openxmlformats.org/drawingml/2006/main">
@@ -30123,7 +30012,7 @@
                   <a:srgbClr val="000000"/>
                 </a:solidFill>
               </a:rPr>
-              <a:t> Portable checks — Verifiers test observed build/runtime behavior rather than vendor names.</a:t>
+              <a:t> Toolchain owners refresh sources — Compiler, loader, plugin, and package changes update the source ledger and affected tasks.</a:t>
             </a:r>
           </a:p>
           <a:p xmlns:a="http://schemas.openxmlformats.org/drawingml/2006/main">
@@ -30144,7 +30033,7 @@
                   <a:srgbClr val="000000"/>
                 </a:solidFill>
               </a:rPr>
-              <a:t> Honest limits — Specialized hardware enters only when hosted systems cannot reproduce the task faithfully.</a:t>
+              <a:t> UXL infrastructure maintains — Validators, Harbor execution, dashboards, and specialized-lane contracts.</a:t>
             </a:r>
           </a:p>
         </p:txBody>
@@ -30236,211 +30125,6 @@
           <a:lstStyle xmlns:a="http://schemas.openxmlformats.org/drawingml/2006/main"/>
           <a:p xmlns:a="http://schemas.openxmlformats.org/drawingml/2006/main">
             <a:r>
-              <a:t>What shared ownership would look like</a:t>
-            </a:r>
-          </a:p>
-        </p:txBody>
-      </p:sp>
-      <p:sp>
-        <p:nvSpPr>
-          <p:cNvPr id="3" name="Content Placeholder 2">
-            <a:extLst xmlns:a="http://schemas.openxmlformats.org/drawingml/2006/main">
-              <a:ext uri="{FF2B5EF4-FFF2-40B4-BE49-F238E27FC236}">
-                <a16:creationId xmlns:a16="http://schemas.microsoft.com/office/drawing/2014/main" id="{ECF5C9F1-2691-0BC9-F1E1-01CECB857FE3}"/>
-              </a:ext>
-            </a:extLst>
-          </p:cNvPr>
-          <p:cNvSpPr>
-            <a:spLocks xmlns:a="http://schemas.openxmlformats.org/drawingml/2006/main" noGrp="1"/>
-          </p:cNvSpPr>
-          <p:nvPr>
-            <p:ph type="body" idx="1"/>
-          </p:nvPr>
-        </p:nvSpPr>
-        <p:spPr>
-          <a:xfrm xmlns:a="http://schemas.openxmlformats.org/drawingml/2006/main">
-            <a:off x="838200" y="1825625"/>
-            <a:ext cx="10515600" cy="4351200"/>
-          </a:xfrm>
-        </p:spPr>
-        <p:txBody>
-          <a:bodyPr xmlns:a="http://schemas.openxmlformats.org/drawingml/2006/main" wrap="square" anchor="t">
-            <a:normAutofit fontScale="100000"/>
-          </a:bodyPr>
-          <a:lstStyle xmlns:a="http://schemas.openxmlformats.org/drawingml/2006/main"/>
-          <a:p xmlns:a="http://schemas.openxmlformats.org/drawingml/2006/main">
-            <a:pPr marL="30" indent="-18">
-              <a:spcAft>
-                <a:spcPts val="10"/>
-              </a:spcAft>
-              <a:buChar char="•"/>
-              <a:defRPr sz="1913">
-                <a:solidFill>
-                  <a:srgbClr val="000000"/>
-                </a:solidFill>
-              </a:defRPr>
-            </a:pPr>
-            <a:r>
-              <a:rPr sz="1913" b="1">
-                <a:solidFill>
-                  <a:srgbClr val="000000"/>
-                </a:solidFill>
-              </a:rPr>
-              <a:t> UXL working-group reviewers own — Shared terminology, routing rules, safe probes, and vendor-neutral limitations.</a:t>
-            </a:r>
-          </a:p>
-          <a:p xmlns:a="http://schemas.openxmlformats.org/drawingml/2006/main">
-            <a:pPr marL="30" indent="-18">
-              <a:spcAft>
-                <a:spcPts val="10"/>
-              </a:spcAft>
-              <a:buChar char="•"/>
-              <a:defRPr sz="1913">
-                <a:solidFill>
-                  <a:srgbClr val="000000"/>
-                </a:solidFill>
-              </a:defRPr>
-            </a:pPr>
-            <a:r>
-              <a:rPr sz="1913" b="1">
-                <a:solidFill>
-                  <a:srgbClr val="000000"/>
-                </a:solidFill>
-              </a:rPr>
-              <a:t> Project maintainers validate hand-offs — Each library confirms where general SYCL triage ends and project behavior begins.</a:t>
-            </a:r>
-          </a:p>
-          <a:p xmlns:a="http://schemas.openxmlformats.org/drawingml/2006/main">
-            <a:pPr marL="30" indent="-18">
-              <a:spcAft>
-                <a:spcPts val="10"/>
-              </a:spcAft>
-              <a:buChar char="•"/>
-              <a:defRPr sz="1913">
-                <a:solidFill>
-                  <a:srgbClr val="000000"/>
-                </a:solidFill>
-              </a:defRPr>
-            </a:pPr>
-            <a:r>
-              <a:rPr sz="1913" b="1">
-                <a:solidFill>
-                  <a:srgbClr val="000000"/>
-                </a:solidFill>
-              </a:rPr>
-              <a:t> Toolchain owners refresh sources — Compiler, loader, plugin, and package changes update the source ledger and affected tasks.</a:t>
-            </a:r>
-          </a:p>
-          <a:p xmlns:a="http://schemas.openxmlformats.org/drawingml/2006/main">
-            <a:pPr marL="30" indent="-18">
-              <a:spcAft>
-                <a:spcPts val="10"/>
-              </a:spcAft>
-              <a:buChar char="•"/>
-              <a:defRPr sz="1913">
-                <a:solidFill>
-                  <a:srgbClr val="000000"/>
-                </a:solidFill>
-              </a:defRPr>
-            </a:pPr>
-            <a:r>
-              <a:rPr sz="1913" b="1">
-                <a:solidFill>
-                  <a:srgbClr val="000000"/>
-                </a:solidFill>
-              </a:rPr>
-              <a:t> UXL infrastructure maintains — Validators, Harbor execution, dashboards, and specialized-lane contracts.</a:t>
-            </a:r>
-          </a:p>
-        </p:txBody>
-      </p:sp>
-      <p:sp>
-        <p:nvSpPr>
-          <p:cNvPr id="7" name="TextBox 6">
-            <a:extLst xmlns:a="http://schemas.openxmlformats.org/drawingml/2006/main">
-              <a:ext uri="{FF2B5EF4-FFF2-40B4-BE49-F238E27FC236}">
-                <a16:creationId xmlns:a16="http://schemas.microsoft.com/office/drawing/2014/main" id="{E2E6F043-0F84-54F7-A567-6E5851801779}"/>
-              </a:ext>
-            </a:extLst>
-          </p:cNvPr>
-          <p:cNvSpPr>
-            <a:spLocks xmlns:a="http://schemas.openxmlformats.org/drawingml/2006/main" noGrp="1"/>
-          </p:cNvSpPr>
-          <p:nvPr/>
-        </p:nvSpPr>
-        <p:spPr>
-          <a:xfrm xmlns:a="http://schemas.openxmlformats.org/drawingml/2006/main">
-            <a:off x="696174" y="6338986"/>
-            <a:ext cx="284052" cy="307777"/>
-          </a:xfrm>
-          <a:prstGeom xmlns:a="http://schemas.openxmlformats.org/drawingml/2006/main" prst="rect">
-            <a:avLst/>
-          </a:prstGeom>
-          <a:noFill xmlns:a="http://schemas.openxmlformats.org/drawingml/2006/main"/>
-        </p:spPr>
-        <p:txBody>
-          <a:bodyPr xmlns:a="http://schemas.openxmlformats.org/drawingml/2006/main" wrap="none">
-            <a:spAutoFit/>
-          </a:bodyPr>
-          <a:lstStyle xmlns:a="http://schemas.openxmlformats.org/drawingml/2006/main"/>
-          <a:p xmlns:a="http://schemas.openxmlformats.org/drawingml/2006/main">
-            <a:r>
-              <a:t>6</a:t>
-            </a:r>
-          </a:p>
-        </p:txBody>
-      </p:sp>
-    </p:spTree>
-    <p:extLst>
-      <p:ext uri="{BB962C8B-B14F-4D97-AF65-F5344CB8AC3E}">
-        <p14:creationId xmlns:p14="http://schemas.microsoft.com/office/powerpoint/2010/main" val="1742728663"/>
-      </p:ext>
-    </p:extLst>
-  </p:cSld>
-</p:sld>
-</file>
-
-<file path=ppt/slides/slide7.xml><?xml version="1.0" encoding="utf-8"?>
-<p:sld xmlns:p="http://schemas.openxmlformats.org/presentationml/2006/main">
-  <p:cSld>
-    <p:spTree>
-      <p:nvGrpSpPr>
-        <p:cNvPr id="1" name=""/>
-        <p:cNvGrpSpPr/>
-        <p:nvPr/>
-      </p:nvGrpSpPr>
-      <p:grpSpPr>
-        <a:xfrm xmlns:a="http://schemas.openxmlformats.org/drawingml/2006/main"/>
-      </p:grpSpPr>
-      <p:sp>
-        <p:nvSpPr>
-          <p:cNvPr id="2" name="Title 1">
-            <a:extLst xmlns:a="http://schemas.openxmlformats.org/drawingml/2006/main">
-              <a:ext uri="{FF2B5EF4-FFF2-40B4-BE49-F238E27FC236}">
-                <a16:creationId xmlns:a16="http://schemas.microsoft.com/office/drawing/2014/main" id="{F64C2A24-546D-C55C-2C52-97A4957F67E0}"/>
-              </a:ext>
-            </a:extLst>
-          </p:cNvPr>
-          <p:cNvSpPr>
-            <a:spLocks xmlns:a="http://schemas.openxmlformats.org/drawingml/2006/main" noGrp="1"/>
-          </p:cNvSpPr>
-          <p:nvPr>
-            <p:ph type="title" idx="0"/>
-          </p:nvPr>
-        </p:nvSpPr>
-        <p:spPr>
-          <a:xfrm xmlns:a="http://schemas.openxmlformats.org/drawingml/2006/main">
-            <a:off x="838200" y="365125"/>
-            <a:ext cx="10515600" cy="1325700"/>
-          </a:xfrm>
-        </p:spPr>
-        <p:txBody>
-          <a:bodyPr xmlns:a="http://schemas.openxmlformats.org/drawingml/2006/main">
-            <a:normAutofit fontScale="100000"/>
-          </a:bodyPr>
-          <a:lstStyle xmlns:a="http://schemas.openxmlformats.org/drawingml/2006/main"/>
-          <a:p xmlns:a="http://schemas.openxmlformats.org/drawingml/2006/main">
-            <a:r>
               <a:t>A focused 30-minute maintainer review</a:t>
             </a:r>
           </a:p>
@@ -30611,7 +30295,7 @@
           <a:lstStyle xmlns:a="http://schemas.openxmlformats.org/drawingml/2006/main"/>
           <a:p xmlns:a="http://schemas.openxmlformats.org/drawingml/2006/main">
             <a:r>
-              <a:t>7</a:t>
+              <a:t>6</a:t>
             </a:r>
           </a:p>
         </p:txBody>

--- a/evaluation/dashboard/public/decks/uxl-sycl-build-debug-maintainer-briefing.pptx
+++ b/evaluation/dashboard/public/decks/uxl-sycl-build-debug-maintainer-briefing.pptx
@@ -2,19 +2,19 @@
 <file path=ppt/presentation.xml><?xml version="1.0" encoding="utf-8"?>
 <p:presentation xmlns:p="http://schemas.openxmlformats.org/presentationml/2006/main">
   <p:sldMasterIdLst>
-    <p:sldMasterId xmlns:r="http://schemas.openxmlformats.org/officeDocument/2006/relationships" id="2147483648" r:id="Rd54a69935d1549d1"/>
-    <p:sldMasterId xmlns:r="http://schemas.openxmlformats.org/officeDocument/2006/relationships" id="2147483665" r:id="R516d5ad8061b4da0"/>
+    <p:sldMasterId xmlns:r="http://schemas.openxmlformats.org/officeDocument/2006/relationships" id="2147483648" r:id="Rae4e974f68a446ff"/>
+    <p:sldMasterId xmlns:r="http://schemas.openxmlformats.org/officeDocument/2006/relationships" id="2147483665" r:id="R5db07f7db83e468e"/>
   </p:sldMasterIdLst>
   <p:notesMasterIdLst>
-    <p:notesMasterId xmlns:r="http://schemas.openxmlformats.org/officeDocument/2006/relationships" r:id="Ra81261da91374a60"/>
+    <p:notesMasterId xmlns:r="http://schemas.openxmlformats.org/officeDocument/2006/relationships" r:id="R5760d216e9b2490b"/>
   </p:notesMasterIdLst>
   <p:sldIdLst>
-    <p:sldId xmlns:r="http://schemas.openxmlformats.org/officeDocument/2006/relationships" id="256" r:id="R05f9d3af4a7c4ff5"/>
-    <p:sldId xmlns:r="http://schemas.openxmlformats.org/officeDocument/2006/relationships" id="257" r:id="R4dc964c9c5ad4456"/>
-    <p:sldId xmlns:r="http://schemas.openxmlformats.org/officeDocument/2006/relationships" id="258" r:id="R6938ca3f138b43bd"/>
-    <p:sldId xmlns:r="http://schemas.openxmlformats.org/officeDocument/2006/relationships" id="259" r:id="R1ba4517ef056468a"/>
-    <p:sldId xmlns:r="http://schemas.openxmlformats.org/officeDocument/2006/relationships" id="260" r:id="R92e399ecc4c54607"/>
-    <p:sldId xmlns:r="http://schemas.openxmlformats.org/officeDocument/2006/relationships" id="261" r:id="Rc8f130969022412f"/>
+    <p:sldId xmlns:r="http://schemas.openxmlformats.org/officeDocument/2006/relationships" id="256" r:id="R87f88efcdadd4a72"/>
+    <p:sldId xmlns:r="http://schemas.openxmlformats.org/officeDocument/2006/relationships" id="257" r:id="R94c2b5b605b1416d"/>
+    <p:sldId xmlns:r="http://schemas.openxmlformats.org/officeDocument/2006/relationships" id="258" r:id="R1d479bd6a3384f37"/>
+    <p:sldId xmlns:r="http://schemas.openxmlformats.org/officeDocument/2006/relationships" id="259" r:id="R7f3656e3f9a14139"/>
+    <p:sldId xmlns:r="http://schemas.openxmlformats.org/officeDocument/2006/relationships" id="260" r:id="R64b2873bcb344318"/>
+    <p:sldId xmlns:r="http://schemas.openxmlformats.org/officeDocument/2006/relationships" id="261" r:id="R2a6e646ac27a4446"/>
   </p:sldIdLst>
   <p:sldSz cx="12192000" cy="6858000"/>
   <p:notesSz cx="6858000" cy="9144000"/>
@@ -518,7 +518,22 @@
           </a:p>
           <a:p xmlns:a="http://schemas.openxmlformats.org/drawingml/2006/main">
             <a:r>
-              <a:t>Speaker cue: UXL SKILLS EVALUATOR: SYCL Build &amp; Debug Skill</a:t>
+              <a:t>Presenter guidance</a:t>
+            </a:r>
+          </a:p>
+          <a:p xmlns:a="http://schemas.openxmlformats.org/drawingml/2006/main">
+            <a:r>
+              <a:t>Purpose: Introduce the shared SYCL build-and-debug skill and its current 8-of-8 runnable task inventory.</a:t>
+            </a:r>
+          </a:p>
+          <a:p xmlns:a="http://schemas.openxmlformats.org/drawingml/2006/main">
+            <a:r>
+              <a:t>Explain: It gives agents a portable first-response method for failures that cross compiler, loader, runtime, device-selection, and library boundaries.</a:t>
+            </a:r>
+          </a:p>
+          <a:p xmlns:a="http://schemas.openxmlformats.org/drawingml/2006/main">
+            <a:r>
+              <a:t>Emphasize: This shared skill complements project-specific guidance; it does not replace a library maintainer's diagnosis.</a:t>
             </a:r>
           </a:p>
         </p:txBody>
@@ -628,7 +643,22 @@
           </a:p>
           <a:p xmlns:a="http://schemas.openxmlformats.org/drawingml/2006/main">
             <a:r>
-              <a:t>Speaker cue: What the skill tells an agent today</a:t>
+              <a:t>Presenter guidance</a:t>
+            </a:r>
+          </a:p>
+          <a:p xmlns:a="http://schemas.openxmlformats.org/drawingml/2006/main">
+            <a:r>
+              <a:t>Purpose: Explain the five-phase triage path used by the skill.</a:t>
+            </a:r>
+          </a:p>
+          <a:p xmlns:a="http://schemas.openxmlformats.org/drawingml/2006/main">
+            <a:r>
+              <a:t>Explain: Agents classify configure, compile, link, runtime-load, and device-selection failures separately, record the environment, and prove the selected device with a minimal workload.</a:t>
+            </a:r>
+          </a:p>
+          <a:p xmlns:a="http://schemas.openxmlformats.org/drawingml/2006/main">
+            <a:r>
+              <a:t>Emphasize: The portable observation is authoritative; the skill deliberately avoids a permanent vendor or backend support matrix.</a:t>
             </a:r>
           </a:p>
         </p:txBody>
@@ -738,7 +768,22 @@
           </a:p>
           <a:p xmlns:a="http://schemas.openxmlformats.org/drawingml/2006/main">
             <a:r>
-              <a:t>Speaker cue: Evaluation inventory: all 8 tasks implemented</a:t>
+              <a:t>Presenter guidance</a:t>
+            </a:r>
+          </a:p>
+          <a:p xmlns:a="http://schemas.openxmlformats.org/drawingml/2006/main">
+            <a:r>
+              <a:t>Purpose: Interpret the eight implemented tasks accurately.</a:t>
+            </a:r>
+          </a:p>
+          <a:p xmlns:a="http://schemas.openxmlformats.org/drawingml/2006/main">
+            <a:r>
+              <a:t>Explain: The tasks cover discovery, loader and plugin mismatch, silent fallback, compiler cache, backend linking, compile-time selection, transitive targets, and runtime composition.</a:t>
+            </a:r>
+          </a:p>
+          <a:p xmlns:a="http://schemas.openxmlformats.org/drawingml/2006/main">
+            <a:r>
+              <a:t>Emphasize: Complete task inventory is not the same as measured skill benefit; matched model and toolchain cells are still needed.</a:t>
             </a:r>
           </a:p>
         </p:txBody>
@@ -848,7 +893,22 @@
           </a:p>
           <a:p xmlns:a="http://schemas.openxmlformats.org/drawingml/2006/main">
             <a:r>
-              <a:t>Speaker cue: How we chose the content</a:t>
+              <a:t>Presenter guidance</a:t>
+            </a:r>
+          </a:p>
+          <a:p xmlns:a="http://schemas.openxmlformats.org/drawingml/2006/main">
+            <a:r>
+              <a:t>Purpose: Describe how the shared content was chosen.</a:t>
+            </a:r>
+          </a:p>
+          <a:p xmlns:a="http://schemas.openxmlformats.org/drawingml/2006/main">
+            <a:r>
+              <a:t>Explain: The draft combines official toolchain and project sources with recurring failure boundaries, then verifies observed behavior rather than checking vendor names.</a:t>
+            </a:r>
+          </a:p>
+          <a:p xmlns:a="http://schemas.openxmlformats.org/drawingml/2006/main">
+            <a:r>
+              <a:t>Emphasize: Specialized hardware is introduced only when hosted systems cannot reproduce a case faithfully.</a:t>
             </a:r>
           </a:p>
         </p:txBody>
@@ -958,7 +1018,22 @@
           </a:p>
           <a:p xmlns:a="http://schemas.openxmlformats.org/drawingml/2006/main">
             <a:r>
-              <a:t>Speaker cue: What shared ownership would look like</a:t>
+              <a:t>Presenter guidance</a:t>
+            </a:r>
+          </a:p>
+          <a:p xmlns:a="http://schemas.openxmlformats.org/drawingml/2006/main">
+            <a:r>
+              <a:t>Purpose: Set expectations for cross-project ownership.</a:t>
+            </a:r>
+          </a:p>
+          <a:p xmlns:a="http://schemas.openxmlformats.org/drawingml/2006/main">
+            <a:r>
+              <a:t>Explain: Shared reviewers own terminology and safe probes; library maintainers validate hand-offs; toolchain owners refresh changing source facts; UXL operates evaluation infrastructure.</a:t>
+            </a:r>
+          </a:p>
+          <a:p xmlns:a="http://schemas.openxmlformats.org/drawingml/2006/main">
+            <a:r>
+              <a:t>Emphasize: Every routing boundary needs an identifiable upstream owner so advice does not become stale or contradictory.</a:t>
             </a:r>
           </a:p>
         </p:txBody>
@@ -1068,7 +1143,22 @@
           </a:p>
           <a:p xmlns:a="http://schemas.openxmlformats.org/drawingml/2006/main">
             <a:r>
-              <a:t>Speaker cue: A focused 30-minute maintainer review</a:t>
+              <a:t>Presenter guidance</a:t>
+            </a:r>
+          </a:p>
+          <a:p xmlns:a="http://schemas.openxmlformats.org/drawingml/2006/main">
+            <a:r>
+              <a:t>Purpose: Conclude with a focused review request.</a:t>
+            </a:r>
+          </a:p>
+          <a:p xmlns:a="http://schemas.openxmlformats.org/drawingml/2006/main">
+            <a:r>
+              <a:t>Explain: Ask reviewers to confirm the five phases, correct one routing boundary, classify the eight tasks, and identify a shared owner.</a:t>
+            </a:r>
+          </a:p>
+          <a:p xmlns:a="http://schemas.openxmlformats.org/drawingml/2006/main">
+            <a:r>
+              <a:t>Emphasize: Success is a common, reproducible first-response playbook—not universal approval of every draft sentence.</a:t>
             </a:r>
           </a:p>
         </p:txBody>
@@ -1104,7 +1194,7 @@
     <p:bg>
       <p:bgPr>
         <a:blipFill xmlns:a="http://schemas.openxmlformats.org/drawingml/2006/main">
-          <a:blip xmlns:r="http://schemas.openxmlformats.org/officeDocument/2006/relationships" r:embed="R7ffd718bc7064707">
+          <a:blip xmlns:r="http://schemas.openxmlformats.org/officeDocument/2006/relationships" r:embed="Rcccfab5806be4312">
             <a:alphaModFix/>
           </a:blip>
           <a:stretch>
@@ -1539,7 +1629,7 @@
           <p:nvPr/>
         </p:nvPicPr>
         <p:blipFill rotWithShape="1">
-          <a:blip xmlns:r="http://schemas.openxmlformats.org/officeDocument/2006/relationships" xmlns:a="http://schemas.openxmlformats.org/drawingml/2006/main" r:embed="R5707f1f07cef4ff2">
+          <a:blip xmlns:r="http://schemas.openxmlformats.org/officeDocument/2006/relationships" xmlns:a="http://schemas.openxmlformats.org/drawingml/2006/main" r:embed="R4e59c503075d46e6">
             <a:alphaModFix/>
           </a:blip>
           <a:srcRect xmlns:a="http://schemas.openxmlformats.org/drawingml/2006/main" l="0" t="0" r="0" b="0"/>
@@ -1569,7 +1659,7 @@
     <p:bg>
       <p:bgPr>
         <a:blipFill xmlns:a="http://schemas.openxmlformats.org/drawingml/2006/main">
-          <a:blip xmlns:r="http://schemas.openxmlformats.org/officeDocument/2006/relationships" r:embed="R59d129ff39044bf2">
+          <a:blip xmlns:r="http://schemas.openxmlformats.org/officeDocument/2006/relationships" r:embed="R1ba6579c5dc54b6d">
             <a:alphaModFix/>
           </a:blip>
           <a:stretch>
@@ -2603,7 +2693,7 @@
           <p:nvPr/>
         </p:nvPicPr>
         <p:blipFill rotWithShape="1">
-          <a:blip xmlns:r="http://schemas.openxmlformats.org/officeDocument/2006/relationships" xmlns:a="http://schemas.openxmlformats.org/drawingml/2006/main" r:embed="Re15726e2105a496b">
+          <a:blip xmlns:r="http://schemas.openxmlformats.org/officeDocument/2006/relationships" xmlns:a="http://schemas.openxmlformats.org/drawingml/2006/main" r:embed="R48c6eeaec6184027">
             <a:alphaModFix/>
           </a:blip>
           <a:srcRect xmlns:a="http://schemas.openxmlformats.org/drawingml/2006/main" l="0" t="0" r="0" b="0"/>
@@ -3627,7 +3717,7 @@
           <p:nvPr/>
         </p:nvPicPr>
         <p:blipFill rotWithShape="1">
-          <a:blip xmlns:r="http://schemas.openxmlformats.org/officeDocument/2006/relationships" xmlns:a="http://schemas.openxmlformats.org/drawingml/2006/main" r:embed="R988580b1c07f45b1">
+          <a:blip xmlns:r="http://schemas.openxmlformats.org/officeDocument/2006/relationships" xmlns:a="http://schemas.openxmlformats.org/drawingml/2006/main" r:embed="R25fcb9ca1a4b4c60">
             <a:alphaModFix/>
           </a:blip>
           <a:srcRect xmlns:a="http://schemas.openxmlformats.org/drawingml/2006/main" l="0" t="0" r="0" b="0"/>
@@ -3657,7 +3747,7 @@
     <p:bg>
       <p:bgPr>
         <a:blipFill xmlns:a="http://schemas.openxmlformats.org/drawingml/2006/main">
-          <a:blip xmlns:r="http://schemas.openxmlformats.org/officeDocument/2006/relationships" r:embed="R88323bb088674b70">
+          <a:blip xmlns:r="http://schemas.openxmlformats.org/officeDocument/2006/relationships" r:embed="R7038ac7cdb5b4edc">
             <a:alphaModFix/>
           </a:blip>
           <a:stretch>
@@ -4931,7 +5021,7 @@
           <p:nvPr/>
         </p:nvPicPr>
         <p:blipFill rotWithShape="1">
-          <a:blip xmlns:r="http://schemas.openxmlformats.org/officeDocument/2006/relationships" xmlns:a="http://schemas.openxmlformats.org/drawingml/2006/main" r:embed="R7cb79f4661f24ce8">
+          <a:blip xmlns:r="http://schemas.openxmlformats.org/officeDocument/2006/relationships" xmlns:a="http://schemas.openxmlformats.org/drawingml/2006/main" r:embed="Redaada7d56924102">
             <a:alphaModFix/>
           </a:blip>
           <a:srcRect xmlns:a="http://schemas.openxmlformats.org/drawingml/2006/main" l="0" t="0" r="0" b="0"/>
@@ -8175,7 +8265,7 @@
           <p:nvPr/>
         </p:nvPicPr>
         <p:blipFill rotWithShape="1">
-          <a:blip xmlns:r="http://schemas.openxmlformats.org/officeDocument/2006/relationships" xmlns:a="http://schemas.openxmlformats.org/drawingml/2006/main" r:embed="R48039f85e6c44e3f">
+          <a:blip xmlns:r="http://schemas.openxmlformats.org/officeDocument/2006/relationships" xmlns:a="http://schemas.openxmlformats.org/drawingml/2006/main" r:embed="Rf8534acb048d4073">
             <a:alphaModFix/>
           </a:blip>
           <a:srcRect xmlns:a="http://schemas.openxmlformats.org/drawingml/2006/main" l="0" t="0" r="0" b="0"/>
@@ -9913,7 +10003,7 @@
           <p:nvPr/>
         </p:nvPicPr>
         <p:blipFill rotWithShape="1">
-          <a:blip xmlns:r="http://schemas.openxmlformats.org/officeDocument/2006/relationships" xmlns:a="http://schemas.openxmlformats.org/drawingml/2006/main" r:embed="R6c41cac0009c43b1">
+          <a:blip xmlns:r="http://schemas.openxmlformats.org/officeDocument/2006/relationships" xmlns:a="http://schemas.openxmlformats.org/drawingml/2006/main" r:embed="R40de596df6164c45">
             <a:alphaModFix/>
           </a:blip>
           <a:srcRect xmlns:a="http://schemas.openxmlformats.org/drawingml/2006/main" l="0" t="0" r="0" b="0"/>
@@ -16742,7 +16832,7 @@
     <p:bg>
       <p:bgPr>
         <a:blipFill xmlns:a="http://schemas.openxmlformats.org/drawingml/2006/main">
-          <a:blip xmlns:r="http://schemas.openxmlformats.org/officeDocument/2006/relationships" r:embed="Rf57a962c0cb842d7">
+          <a:blip xmlns:r="http://schemas.openxmlformats.org/officeDocument/2006/relationships" r:embed="Rf680c4dc2ba34678">
             <a:alphaModFix/>
           </a:blip>
           <a:stretch>
@@ -17177,7 +17267,7 @@
           <p:nvPr/>
         </p:nvPicPr>
         <p:blipFill rotWithShape="1">
-          <a:blip xmlns:r="http://schemas.openxmlformats.org/officeDocument/2006/relationships" xmlns:a="http://schemas.openxmlformats.org/drawingml/2006/main" r:embed="R144c5a5851bf42e3">
+          <a:blip xmlns:r="http://schemas.openxmlformats.org/officeDocument/2006/relationships" xmlns:a="http://schemas.openxmlformats.org/drawingml/2006/main" r:embed="R37cd099f15f94842">
             <a:alphaModFix/>
           </a:blip>
           <a:srcRect xmlns:a="http://schemas.openxmlformats.org/drawingml/2006/main" l="0" t="0" r="0" b="0"/>
@@ -17207,7 +17297,7 @@
     <p:bg>
       <p:bgPr>
         <a:blipFill xmlns:a="http://schemas.openxmlformats.org/drawingml/2006/main">
-          <a:blip xmlns:r="http://schemas.openxmlformats.org/officeDocument/2006/relationships" r:embed="Rc25fab442047497a">
+          <a:blip xmlns:r="http://schemas.openxmlformats.org/officeDocument/2006/relationships" r:embed="R9b8069db7bd94cda">
             <a:alphaModFix/>
           </a:blip>
           <a:stretch>
@@ -17840,7 +17930,7 @@
           <p:nvPr/>
         </p:nvPicPr>
         <p:blipFill rotWithShape="1">
-          <a:blip xmlns:r="http://schemas.openxmlformats.org/officeDocument/2006/relationships" xmlns:a="http://schemas.openxmlformats.org/drawingml/2006/main" r:embed="R8b31c408e5e44d02">
+          <a:blip xmlns:r="http://schemas.openxmlformats.org/officeDocument/2006/relationships" xmlns:a="http://schemas.openxmlformats.org/drawingml/2006/main" r:embed="R7473b3831c694177">
             <a:alphaModFix/>
           </a:blip>
           <a:srcRect xmlns:a="http://schemas.openxmlformats.org/drawingml/2006/main" l="0" t="0" r="0" b="0"/>
@@ -18300,7 +18390,7 @@
     <p:bg>
       <p:bgPr>
         <a:blipFill xmlns:a="http://schemas.openxmlformats.org/drawingml/2006/main">
-          <a:blip xmlns:r="http://schemas.openxmlformats.org/officeDocument/2006/relationships" r:embed="Re5e7fa0510474b92">
+          <a:blip xmlns:r="http://schemas.openxmlformats.org/officeDocument/2006/relationships" r:embed="R8f739cc9ca1244d5">
             <a:alphaModFix/>
           </a:blip>
           <a:stretch>
@@ -18933,7 +19023,7 @@
           <p:nvPr/>
         </p:nvPicPr>
         <p:blipFill rotWithShape="1">
-          <a:blip xmlns:r="http://schemas.openxmlformats.org/officeDocument/2006/relationships" xmlns:a="http://schemas.openxmlformats.org/drawingml/2006/main" r:embed="R38e36b7a97fc48ad">
+          <a:blip xmlns:r="http://schemas.openxmlformats.org/officeDocument/2006/relationships" xmlns:a="http://schemas.openxmlformats.org/drawingml/2006/main" r:embed="R8b5660803a3d42a3">
             <a:alphaModFix/>
           </a:blip>
           <a:srcRect xmlns:a="http://schemas.openxmlformats.org/drawingml/2006/main" l="0" t="0" r="0" b="0"/>
@@ -21589,7 +21679,7 @@
           <p:nvPr/>
         </p:nvPicPr>
         <p:blipFill rotWithShape="1">
-          <a:blip xmlns:r="http://schemas.openxmlformats.org/officeDocument/2006/relationships" xmlns:a="http://schemas.openxmlformats.org/drawingml/2006/main" r:embed="R7444d9ca8a5b45da">
+          <a:blip xmlns:r="http://schemas.openxmlformats.org/officeDocument/2006/relationships" xmlns:a="http://schemas.openxmlformats.org/drawingml/2006/main" r:embed="R9bc47fa0b0d04c99">
             <a:alphaModFix/>
           </a:blip>
           <a:srcRect xmlns:a="http://schemas.openxmlformats.org/drawingml/2006/main" l="0" t="0" r="0" b="0"/>
@@ -21619,7 +21709,7 @@
     <p:bg>
       <p:bgPr>
         <a:blipFill xmlns:a="http://schemas.openxmlformats.org/drawingml/2006/main">
-          <a:blip xmlns:r="http://schemas.openxmlformats.org/officeDocument/2006/relationships" r:embed="R0389185ff8cc4232">
+          <a:blip xmlns:r="http://schemas.openxmlformats.org/officeDocument/2006/relationships" r:embed="R2e3dc08757f34afb">
             <a:alphaModFix/>
           </a:blip>
           <a:stretch>
@@ -22463,7 +22553,7 @@
           <p:nvPr/>
         </p:nvPicPr>
         <p:blipFill rotWithShape="1">
-          <a:blip xmlns:r="http://schemas.openxmlformats.org/officeDocument/2006/relationships" xmlns:a="http://schemas.openxmlformats.org/drawingml/2006/main" r:embed="Rfc103ff1dbf94ee2">
+          <a:blip xmlns:r="http://schemas.openxmlformats.org/officeDocument/2006/relationships" xmlns:a="http://schemas.openxmlformats.org/drawingml/2006/main" r:embed="R45b97e883f414924">
             <a:alphaModFix/>
           </a:blip>
           <a:srcRect xmlns:a="http://schemas.openxmlformats.org/drawingml/2006/main" l="0" t="0" r="0" b="0"/>
@@ -22493,7 +22583,7 @@
     <p:bg>
       <p:bgPr>
         <a:blipFill xmlns:a="http://schemas.openxmlformats.org/drawingml/2006/main">
-          <a:blip xmlns:r="http://schemas.openxmlformats.org/officeDocument/2006/relationships" r:embed="R259b1979c4944927">
+          <a:blip xmlns:r="http://schemas.openxmlformats.org/officeDocument/2006/relationships" r:embed="R8b86128636fd4036">
             <a:alphaModFix/>
           </a:blip>
           <a:stretch>
@@ -23441,7 +23531,7 @@
           <p:nvPr/>
         </p:nvPicPr>
         <p:blipFill rotWithShape="1">
-          <a:blip xmlns:r="http://schemas.openxmlformats.org/officeDocument/2006/relationships" xmlns:a="http://schemas.openxmlformats.org/drawingml/2006/main" r:embed="Rb0db50ec9ea347b4">
+          <a:blip xmlns:r="http://schemas.openxmlformats.org/officeDocument/2006/relationships" xmlns:a="http://schemas.openxmlformats.org/drawingml/2006/main" r:embed="R92e48b2cbfec4b21">
             <a:alphaModFix/>
           </a:blip>
           <a:srcRect xmlns:a="http://schemas.openxmlformats.org/drawingml/2006/main" l="0" t="0" r="0" b="0"/>
@@ -23471,7 +23561,7 @@
     <p:bg>
       <p:bgPr>
         <a:blipFill xmlns:a="http://schemas.openxmlformats.org/drawingml/2006/main">
-          <a:blip xmlns:r="http://schemas.openxmlformats.org/officeDocument/2006/relationships" r:embed="R1008419b1eef40dc">
+          <a:blip xmlns:r="http://schemas.openxmlformats.org/officeDocument/2006/relationships" r:embed="Rda26df3477874f36">
             <a:alphaModFix/>
           </a:blip>
           <a:stretch>
@@ -23932,7 +24022,7 @@
           <p:nvPr/>
         </p:nvPicPr>
         <p:blipFill rotWithShape="1">
-          <a:blip xmlns:r="http://schemas.openxmlformats.org/officeDocument/2006/relationships" xmlns:a="http://schemas.openxmlformats.org/drawingml/2006/main" r:embed="R54b65dff5e5f4c6e">
+          <a:blip xmlns:r="http://schemas.openxmlformats.org/officeDocument/2006/relationships" xmlns:a="http://schemas.openxmlformats.org/drawingml/2006/main" r:embed="R292933fa0a8c4477">
             <a:alphaModFix/>
           </a:blip>
           <a:srcRect xmlns:a="http://schemas.openxmlformats.org/drawingml/2006/main" l="0" t="0" r="0" b="0"/>
@@ -25644,22 +25734,22 @@
   </p:cSld>
   <p:clrMap bg1="lt1" tx1="dk1" bg2="dk2" tx2="lt2" accent1="accent1" accent2="accent2" accent3="accent3" accent4="accent4" accent5="accent5" accent6="accent6" hlink="hlink" folHlink="folHlink"/>
   <p:sldLayoutIdLst>
-    <p:sldLayoutId xmlns:r="http://schemas.openxmlformats.org/officeDocument/2006/relationships" id="2147483649" r:id="Ra4f08b3b81e64125"/>
-    <p:sldLayoutId xmlns:r="http://schemas.openxmlformats.org/officeDocument/2006/relationships" id="2147483650" r:id="R60eaa54271fb4699"/>
-    <p:sldLayoutId xmlns:r="http://schemas.openxmlformats.org/officeDocument/2006/relationships" id="2147483651" r:id="R884b475c37e94c7a"/>
-    <p:sldLayoutId xmlns:r="http://schemas.openxmlformats.org/officeDocument/2006/relationships" id="2147483652" r:id="R3e7beebac0c4418b"/>
-    <p:sldLayoutId xmlns:r="http://schemas.openxmlformats.org/officeDocument/2006/relationships" id="2147483653" r:id="Rede8b30047754cf9"/>
-    <p:sldLayoutId xmlns:r="http://schemas.openxmlformats.org/officeDocument/2006/relationships" id="2147483654" r:id="Re0168725ecd34e9b"/>
-    <p:sldLayoutId xmlns:r="http://schemas.openxmlformats.org/officeDocument/2006/relationships" id="2147483655" r:id="Rc6383963120a4fd9"/>
-    <p:sldLayoutId xmlns:r="http://schemas.openxmlformats.org/officeDocument/2006/relationships" id="2147483656" r:id="Rab3f190b15294ea1"/>
-    <p:sldLayoutId xmlns:r="http://schemas.openxmlformats.org/officeDocument/2006/relationships" id="2147483657" r:id="Rc960c08103e94c47"/>
-    <p:sldLayoutId xmlns:r="http://schemas.openxmlformats.org/officeDocument/2006/relationships" id="2147483658" r:id="Re04324add31f461a"/>
-    <p:sldLayoutId xmlns:r="http://schemas.openxmlformats.org/officeDocument/2006/relationships" id="2147483659" r:id="Ra16244500cb5450d"/>
-    <p:sldLayoutId xmlns:r="http://schemas.openxmlformats.org/officeDocument/2006/relationships" id="2147483660" r:id="R507dc18e7d294017"/>
-    <p:sldLayoutId xmlns:r="http://schemas.openxmlformats.org/officeDocument/2006/relationships" id="2147483661" r:id="Rae2537dbe6404f94"/>
-    <p:sldLayoutId xmlns:r="http://schemas.openxmlformats.org/officeDocument/2006/relationships" id="2147483662" r:id="Ra4bd3b2fbb5f4b21"/>
-    <p:sldLayoutId xmlns:r="http://schemas.openxmlformats.org/officeDocument/2006/relationships" id="2147483663" r:id="Rb9deda1545e742c8"/>
-    <p:sldLayoutId xmlns:r="http://schemas.openxmlformats.org/officeDocument/2006/relationships" id="2147483664" r:id="R974ce645d5494781"/>
+    <p:sldLayoutId xmlns:r="http://schemas.openxmlformats.org/officeDocument/2006/relationships" id="2147483649" r:id="Rfc9c5f65409e4b15"/>
+    <p:sldLayoutId xmlns:r="http://schemas.openxmlformats.org/officeDocument/2006/relationships" id="2147483650" r:id="R252c5098a7a04494"/>
+    <p:sldLayoutId xmlns:r="http://schemas.openxmlformats.org/officeDocument/2006/relationships" id="2147483651" r:id="Rd98f94ca853347e1"/>
+    <p:sldLayoutId xmlns:r="http://schemas.openxmlformats.org/officeDocument/2006/relationships" id="2147483652" r:id="R9962aa01a5504777"/>
+    <p:sldLayoutId xmlns:r="http://schemas.openxmlformats.org/officeDocument/2006/relationships" id="2147483653" r:id="Rb29978e9a6d243ea"/>
+    <p:sldLayoutId xmlns:r="http://schemas.openxmlformats.org/officeDocument/2006/relationships" id="2147483654" r:id="R1135305ea0994dde"/>
+    <p:sldLayoutId xmlns:r="http://schemas.openxmlformats.org/officeDocument/2006/relationships" id="2147483655" r:id="R3808b21fbf48475a"/>
+    <p:sldLayoutId xmlns:r="http://schemas.openxmlformats.org/officeDocument/2006/relationships" id="2147483656" r:id="Rb86171e91e3e458f"/>
+    <p:sldLayoutId xmlns:r="http://schemas.openxmlformats.org/officeDocument/2006/relationships" id="2147483657" r:id="R389639b1374a4182"/>
+    <p:sldLayoutId xmlns:r="http://schemas.openxmlformats.org/officeDocument/2006/relationships" id="2147483658" r:id="R9e1845f2bcc64a36"/>
+    <p:sldLayoutId xmlns:r="http://schemas.openxmlformats.org/officeDocument/2006/relationships" id="2147483659" r:id="Rd368a051139b4f0b"/>
+    <p:sldLayoutId xmlns:r="http://schemas.openxmlformats.org/officeDocument/2006/relationships" id="2147483660" r:id="R1f965e7c85d44b64"/>
+    <p:sldLayoutId xmlns:r="http://schemas.openxmlformats.org/officeDocument/2006/relationships" id="2147483661" r:id="Rcdc5607b51004313"/>
+    <p:sldLayoutId xmlns:r="http://schemas.openxmlformats.org/officeDocument/2006/relationships" id="2147483662" r:id="Raefc228d0d2946f9"/>
+    <p:sldLayoutId xmlns:r="http://schemas.openxmlformats.org/officeDocument/2006/relationships" id="2147483663" r:id="Re0b1096e219c450e"/>
+    <p:sldLayoutId xmlns:r="http://schemas.openxmlformats.org/officeDocument/2006/relationships" id="2147483664" r:id="Rcebe321215344ca0"/>
   </p:sldLayoutIdLst>
   <p:hf hdr="0" ftr="0" dt="0"/>
   <p:txStyles>
@@ -27852,7 +27942,7 @@
           <p:nvPr/>
         </p:nvPicPr>
         <p:blipFill rotWithShape="1">
-          <a:blip xmlns:r="http://schemas.openxmlformats.org/officeDocument/2006/relationships" xmlns:a="http://schemas.openxmlformats.org/drawingml/2006/main" r:embed="Rb7cfa8ccbaeb472b">
+          <a:blip xmlns:r="http://schemas.openxmlformats.org/officeDocument/2006/relationships" xmlns:a="http://schemas.openxmlformats.org/drawingml/2006/main" r:embed="R3db910f570ed432e">
             <a:alphaModFix/>
           </a:blip>
           <a:srcRect xmlns:a="http://schemas.openxmlformats.org/drawingml/2006/main" l="0" t="0" r="0" b="0"/>
@@ -27875,19 +27965,19 @@
   </p:cSld>
   <p:clrMap bg1="lt1" tx1="dk1" bg2="dk2" tx2="lt2" accent1="accent1" accent2="accent2" accent3="accent3" accent4="accent4" accent5="accent5" accent6="accent6" hlink="hlink" folHlink="folHlink"/>
   <p:sldLayoutIdLst>
-    <p:sldLayoutId xmlns:r="http://schemas.openxmlformats.org/officeDocument/2006/relationships" id="2147483666" r:id="Rd50c3b1af8d34bf9"/>
-    <p:sldLayoutId xmlns:r="http://schemas.openxmlformats.org/officeDocument/2006/relationships" id="2147483667" r:id="R30457fd814b14041"/>
-    <p:sldLayoutId xmlns:r="http://schemas.openxmlformats.org/officeDocument/2006/relationships" id="2147483668" r:id="R4da3f0d0b5bf4f1a"/>
-    <p:sldLayoutId xmlns:r="http://schemas.openxmlformats.org/officeDocument/2006/relationships" id="2147483669" r:id="Reba21921baff4a58"/>
-    <p:sldLayoutId xmlns:r="http://schemas.openxmlformats.org/officeDocument/2006/relationships" id="2147483670" r:id="Rc7118064778a4bf9"/>
-    <p:sldLayoutId xmlns:r="http://schemas.openxmlformats.org/officeDocument/2006/relationships" id="2147483671" r:id="R9a11877cbe794c54"/>
-    <p:sldLayoutId xmlns:r="http://schemas.openxmlformats.org/officeDocument/2006/relationships" id="2147483672" r:id="Re878b55f601e403f"/>
-    <p:sldLayoutId xmlns:r="http://schemas.openxmlformats.org/officeDocument/2006/relationships" id="2147483673" r:id="R9e151e64013240a8"/>
-    <p:sldLayoutId xmlns:r="http://schemas.openxmlformats.org/officeDocument/2006/relationships" id="2147483674" r:id="R78b75cb7caef407d"/>
-    <p:sldLayoutId xmlns:r="http://schemas.openxmlformats.org/officeDocument/2006/relationships" id="2147483675" r:id="R77e481a86f03419c"/>
-    <p:sldLayoutId xmlns:r="http://schemas.openxmlformats.org/officeDocument/2006/relationships" id="2147483676" r:id="Rc58f5726b62b4b47"/>
-    <p:sldLayoutId xmlns:r="http://schemas.openxmlformats.org/officeDocument/2006/relationships" id="2147483677" r:id="R639e729bf2ce44bb"/>
-    <p:sldLayoutId xmlns:r="http://schemas.openxmlformats.org/officeDocument/2006/relationships" id="2147483678" r:id="R2a0053672ff74260"/>
+    <p:sldLayoutId xmlns:r="http://schemas.openxmlformats.org/officeDocument/2006/relationships" id="2147483666" r:id="Rcb16999a09f04ed4"/>
+    <p:sldLayoutId xmlns:r="http://schemas.openxmlformats.org/officeDocument/2006/relationships" id="2147483667" r:id="R43d8c9abca15454c"/>
+    <p:sldLayoutId xmlns:r="http://schemas.openxmlformats.org/officeDocument/2006/relationships" id="2147483668" r:id="Re752edae9a144788"/>
+    <p:sldLayoutId xmlns:r="http://schemas.openxmlformats.org/officeDocument/2006/relationships" id="2147483669" r:id="R861bb53720414929"/>
+    <p:sldLayoutId xmlns:r="http://schemas.openxmlformats.org/officeDocument/2006/relationships" id="2147483670" r:id="R4ed3f5a1d1e64c26"/>
+    <p:sldLayoutId xmlns:r="http://schemas.openxmlformats.org/officeDocument/2006/relationships" id="2147483671" r:id="Ra32167aedfa445b4"/>
+    <p:sldLayoutId xmlns:r="http://schemas.openxmlformats.org/officeDocument/2006/relationships" id="2147483672" r:id="Rcf0763fafedf4695"/>
+    <p:sldLayoutId xmlns:r="http://schemas.openxmlformats.org/officeDocument/2006/relationships" id="2147483673" r:id="Rb6b23fc64f0f4a3d"/>
+    <p:sldLayoutId xmlns:r="http://schemas.openxmlformats.org/officeDocument/2006/relationships" id="2147483674" r:id="R38f721b8608b47ec"/>
+    <p:sldLayoutId xmlns:r="http://schemas.openxmlformats.org/officeDocument/2006/relationships" id="2147483675" r:id="R2706780945cd4694"/>
+    <p:sldLayoutId xmlns:r="http://schemas.openxmlformats.org/officeDocument/2006/relationships" id="2147483676" r:id="R2bc45b4b99fa4ae6"/>
+    <p:sldLayoutId xmlns:r="http://schemas.openxmlformats.org/officeDocument/2006/relationships" id="2147483677" r:id="Rdb5f1852c6c04d88"/>
+    <p:sldLayoutId xmlns:r="http://schemas.openxmlformats.org/officeDocument/2006/relationships" id="2147483678" r:id="R9409f4b199084100"/>
   </p:sldLayoutIdLst>
   <p:hf hdr="0" ftr="0" dt="0"/>
   <p:txStyles>
